--- a/assets/pptx/catalog-338.pptx
+++ b/assets/pptx/catalog-338.pptx
@@ -3540,7 +3540,7 @@
                 <a:ea typeface="Ebrima"/>
                 <a:cs typeface="Ebrima"/>
               </a:rPr>
-              <a:t>(2x) ከፍ ላርግህ ከፍ ላርግህ ላውድስህ ላወድስህ (2x)</a:t>
+              <a:t>2x ከፍ ላርግህ ከፍ ላርግህ ላውድስህ ላወድስህ 2x</a:t>
             </a:r>
           </a:p>
         </p:txBody>
@@ -3741,7 +3741,7 @@
                 <a:ea typeface="Ebrima"/>
                 <a:cs typeface="Ebrima"/>
               </a:rPr>
-              <a:t>(2x) ከልቤ በሙሉ ሀይሌ (2x) አመሰግንሀለሁ ክብርን ለአንተ እሰጣለሁ (2x) ኢየሱስ (2x) ኢየሱስ (4x)</a:t>
+              <a:t>2x ከልቤ በሙሉ ሀይሌ 2x አመሰግንሀለሁ ክብርን ለአንተ እሰጣለሁ 2x ኢየሱስ 2x ኢየሱስ 4x</a:t>
             </a:r>
           </a:p>
         </p:txBody>
@@ -4143,7 +4143,7 @@
                 <a:ea typeface="Ebrima"/>
                 <a:cs typeface="Ebrima"/>
               </a:rPr>
-              <a:t>(2x) ላመስግንህ ላመስግንህ ላሞጋግስህ ላሞጋግስህ (2x)</a:t>
+              <a:t>2x ላመስግንህ ላመስግንህ ላሞጋግስህ ላሞጋግስህ 2x</a:t>
             </a:r>
           </a:p>
         </p:txBody>
@@ -4344,7 +4344,7 @@
                 <a:ea typeface="Ebrima"/>
                 <a:cs typeface="Ebrima"/>
               </a:rPr>
-              <a:t>(2x) ከልቤ በሙሉ ሀይሌ (2x) አመሰግንሀለሁ ክብርን ለአንተ እሰጣለሁ (2x) ኢየሱስ (2x)</a:t>
+              <a:t>2x ከልቤ በሙሉ ሀይሌ 2x አመሰግንሀለሁ ክብርን ለአንተ እሰጣለሁ 2x ኢየሱስ 2x</a:t>
             </a:r>
           </a:p>
         </p:txBody>
@@ -4746,7 +4746,7 @@
                 <a:ea typeface="Ebrima"/>
                 <a:cs typeface="Ebrima"/>
               </a:rPr>
-              <a:t>(2x) ልቀኝልህ ልቀኝልህ ላክብርህ ላክብርህ (2x)</a:t>
+              <a:t>2x ልቀኝልህ ልቀኝልህ ላክብርህ ላክብርህ 2x</a:t>
             </a:r>
           </a:p>
         </p:txBody>
@@ -4947,7 +4947,7 @@
                 <a:ea typeface="Ebrima"/>
                 <a:cs typeface="Ebrima"/>
               </a:rPr>
-              <a:t>(2x) ከልቤ በሙሉ ሀይሌ (2x) አመሰግንሀለሁ ክብርን ለአንተ እሰጣለሁ (2x) ኢየሱስ (2x) ኢየሱስ (4x)</a:t>
+              <a:t>2x ከልቤ በሙሉ ሀይሌ 2x አመሰግንሀለሁ ክብርን ለአንተ እሰጣለሁ 2x ኢየሱስ 2x ኢየሱስ 4x</a:t>
             </a:r>
           </a:p>
         </p:txBody>
@@ -5148,7 +5148,7 @@
                 <a:ea typeface="Ebrima"/>
                 <a:cs typeface="Ebrima"/>
               </a:rPr>
-              <a:t>(2x) ልባርክህ ልባርክህ ላምልክህ ላምልክህ (2x)</a:t>
+              <a:t>2x ልባርክህ ልባርክህ ላምልክህ ላምልክህ 2x</a:t>
             </a:r>
           </a:p>
         </p:txBody>
@@ -5349,7 +5349,7 @@
                 <a:ea typeface="Ebrima"/>
                 <a:cs typeface="Ebrima"/>
               </a:rPr>
-              <a:t>(2x) ከልቤ በሙሉ ሀይሌ (2x) አመሰግንሀለሁ ክብርን ለአንተ እሰጣለሁ (2x) ኢየሱስ (2x) ኢየሱስ (4x)</a:t>
+              <a:t>2x ከልቤ በሙሉ ሀይሌ 2x አመሰግንሀለሁ ክብርን ለአንተ እሰጣለሁ 2x ኢየሱስ 2x ኢየሱስ 4x</a:t>
             </a:r>
           </a:p>
         </p:txBody>
